--- a/docs/presentation/xr-splat-technical.pptx
+++ b/docs/presentation/xr-splat-technical.pptx
@@ -3933,6 +3933,28 @@
                 <a:latin typeface="Malgun Gothic"/>
               </a:rPr>
               <a:t>분리했기에 위치는 정확하게, 화면은 실사같게 — 각자 잘하는 걸로</a:t>
+            </a:r>
+          </a:p>
+          <a:p>
+            <a:r>
+              <a:rPr sz="1800" b="0">
+                <a:solidFill>
+                  <a:srgbClr val="1A1A1A"/>
+                </a:solidFill>
+                <a:latin typeface="Malgun Gothic"/>
+              </a:rPr>
+              <a:t>•  </a:t>
+            </a:r>
+          </a:p>
+          <a:p>
+            <a:r>
+              <a:rPr sz="2100" b="1">
+                <a:solidFill>
+                  <a:srgbClr val="1E8E3E"/>
+                </a:solidFill>
+                <a:latin typeface="Malgun Gothic"/>
+              </a:rPr>
+              <a:t>실측 품질 (home mcmc2m): PSNR 27.96 / SSIM 0.871 / LPIPS 0.267</a:t>
             </a:r>
           </a:p>
         </p:txBody>
